--- a/docs/presentation/ESGenuine_presentation.pptx
+++ b/docs/presentation/ESGenuine_presentation.pptx
@@ -730,7 +730,13 @@
           <a:lstStyle/>
           <a:p>
             <a:r>
-              <a:t>Demo path, about 3 minutes. Have the dashboard already open and loaded before this slide — the globe takes a few seconds on first load. Backup: keep a screenshot of each step open in another window in case the venue network fails.</a:t>
+              <a:t>Demo path, about 3 minutes. Have the dashboard already open and loaded before this slide — the globe takes a few seconds on first load. Use 'Jump to company' on the globe rather than dragging it. The screenshots on this slide are the backup if the venue network fails: talk through them in the same order.</a:t>
+            </a:r>
+          </a:p>
+          <a:p/>
+          <a:p>
+            <a:r>
+              <a:t>The demo database holds three reports (Tata Power BRSR FY24, Shell 2022 and 2023; 1,556 claims). Stay on the four pages shown here: Benchmark and Portfolio Overview surface raw extracted locations and mixed-unit series that are not yet cleaned.</a:t>
             </a:r>
           </a:p>
         </p:txBody>
@@ -1011,6 +1017,12 @@
           <a:p>
             <a:r>
               <a:t>This is not a scaffold — it has been run end to end. 1,730 claims from six reports, 461 pages, four companies. The NLI contradiction step and the Sentinel-2 satellite checks have both genuinely executed and persisted results.</a:t>
+            </a:r>
+          </a:p>
+          <a:p/>
+          <a:p>
+            <a:r>
+              <a:t>If asked why the live demo shows fewer claims: the demo database is a rebuild of three of these reports (Tata Power BRSR FY24, Shell 2022 and 2023 — 1,556 claims) loaded from the extractions committed to the repository, with the same repair layer applied. Infosys and Microsoft would need the LLM to be re-run.</a:t>
             </a:r>
           </a:p>
         </p:txBody>
@@ -5421,7 +5433,7 @@
                 </a:solidFill>
                 <a:latin typeface="Segoe UI"/>
               </a:rPr>
-              <a:t>One claim, from the globe down to its source sentence</a:t>
+              <a:t>One claim, from the dashboard down to its source sentence</a:t>
             </a:r>
           </a:p>
         </p:txBody>
@@ -5503,8 +5515,8 @@
         </p:nvSpPr>
         <p:spPr>
           <a:xfrm>
-            <a:off x="548640" y="1874519"/>
-            <a:ext cx="566928" cy="566928"/>
+            <a:off x="548640" y="1783080"/>
+            <a:ext cx="457200" cy="457200"/>
           </a:xfrm>
           <a:prstGeom prst="ellipse">
             <a:avLst/>
@@ -5532,12 +5544,12 @@
           </a:fontRef>
         </p:style>
         <p:txBody>
-          <a:bodyPr rtlCol="0" anchor="ctr"/>
+          <a:bodyPr rtlCol="0" anchor="ctr" lIns="0" rIns="0"/>
           <a:lstStyle/>
           <a:p>
             <a:pPr algn="ctr"/>
             <a:r>
-              <a:rPr sz="1700" b="0" i="0">
+              <a:rPr sz="1400" b="0" i="0">
                 <a:solidFill>
                   <a:srgbClr val="FFFFFF"/>
                 </a:solidFill>
@@ -5556,8 +5568,8 @@
         </p:nvSpPr>
         <p:spPr>
           <a:xfrm>
-            <a:off x="1417320" y="1856231"/>
-            <a:ext cx="10058400" cy="685800"/>
+            <a:off x="1207008" y="1746504"/>
+            <a:ext cx="3566160" cy="914400"/>
           </a:xfrm>
           <a:prstGeom prst="rect">
             <a:avLst/>
@@ -5571,22 +5583,29 @@
           <a:lstStyle/>
           <a:p>
             <a:r>
-              <a:rPr sz="1900" b="0" i="0">
+              <a:rPr sz="1700" b="0" i="0">
                 <a:solidFill>
                   <a:srgbClr val="0B0B0B"/>
                 </a:solidFill>
                 <a:latin typeface="Segoe UI Semibold"/>
               </a:rPr>
-              <a:t>Portfolio globe</a:t>
-            </a:r>
-            <a:r>
-              <a:rPr sz="1600" b="0" i="0">
+              <a:t>Live dashboard</a:t>
+            </a:r>
+          </a:p>
+          <a:p>
+            <a:pPr>
+              <a:spcBef>
+                <a:spcPts val="200"/>
+              </a:spcBef>
+            </a:pPr>
+            <a:r>
+              <a:rPr sz="1300" b="0" i="0">
                 <a:solidFill>
                   <a:srgbClr val="52514E"/>
                 </a:solidFill>
                 <a:latin typeface="Segoe UI"/>
               </a:rPr>
-              <a:t>   pick a company from the map</a:t>
+              <a:t>claims at a glance; jump to a company on the globe</a:t>
             </a:r>
           </a:p>
         </p:txBody>
@@ -5599,8 +5618,8 @@
         </p:nvSpPr>
         <p:spPr>
           <a:xfrm>
-            <a:off x="548640" y="2807207"/>
-            <a:ext cx="566928" cy="566928"/>
+            <a:off x="548640" y="2807208"/>
+            <a:ext cx="457200" cy="457200"/>
           </a:xfrm>
           <a:prstGeom prst="ellipse">
             <a:avLst/>
@@ -5628,12 +5647,12 @@
           </a:fontRef>
         </p:style>
         <p:txBody>
-          <a:bodyPr rtlCol="0" anchor="ctr"/>
+          <a:bodyPr rtlCol="0" anchor="ctr" lIns="0" rIns="0"/>
           <a:lstStyle/>
           <a:p>
             <a:pPr algn="ctr"/>
             <a:r>
-              <a:rPr sz="1700" b="0" i="0">
+              <a:rPr sz="1400" b="0" i="0">
                 <a:solidFill>
                   <a:srgbClr val="FFFFFF"/>
                 </a:solidFill>
@@ -5652,8 +5671,8 @@
         </p:nvSpPr>
         <p:spPr>
           <a:xfrm>
-            <a:off x="1417320" y="2788919"/>
-            <a:ext cx="10058400" cy="685800"/>
+            <a:off x="1207008" y="2770632"/>
+            <a:ext cx="3566160" cy="914400"/>
           </a:xfrm>
           <a:prstGeom prst="rect">
             <a:avLst/>
@@ -5667,7 +5686,7 @@
           <a:lstStyle/>
           <a:p>
             <a:r>
-              <a:rPr sz="1900" b="0" i="0">
+              <a:rPr sz="1700" b="0" i="0">
                 <a:solidFill>
                   <a:srgbClr val="0B0B0B"/>
                 </a:solidFill>
@@ -5675,14 +5694,21 @@
               </a:rPr>
               <a:t>Claim explorer</a:t>
             </a:r>
-            <a:r>
-              <a:rPr sz="1600" b="0" i="0">
+          </a:p>
+          <a:p>
+            <a:pPr>
+              <a:spcBef>
+                <a:spcPts val="200"/>
+              </a:spcBef>
+            </a:pPr>
+            <a:r>
+              <a:rPr sz="1300" b="0" i="0">
                 <a:solidFill>
                   <a:srgbClr val="52514E"/>
                 </a:solidFill>
                 <a:latin typeface="Segoe UI"/>
               </a:rPr>
-              <a:t>   open a claim: value, unit, taxonomy node, page, source sentence</a:t>
+              <a:t>company → report → claim, each with page and source sentence</a:t>
             </a:r>
           </a:p>
         </p:txBody>
@@ -5695,8 +5721,8 @@
         </p:nvSpPr>
         <p:spPr>
           <a:xfrm>
-            <a:off x="548640" y="3739895"/>
-            <a:ext cx="566928" cy="566928"/>
+            <a:off x="548640" y="3831336"/>
+            <a:ext cx="457200" cy="457200"/>
           </a:xfrm>
           <a:prstGeom prst="ellipse">
             <a:avLst/>
@@ -5724,12 +5750,12 @@
           </a:fontRef>
         </p:style>
         <p:txBody>
-          <a:bodyPr rtlCol="0" anchor="ctr"/>
+          <a:bodyPr rtlCol="0" anchor="ctr" lIns="0" rIns="0"/>
           <a:lstStyle/>
           <a:p>
             <a:pPr algn="ctr"/>
             <a:r>
-              <a:rPr sz="1700" b="0" i="0">
+              <a:rPr sz="1400" b="0" i="0">
                 <a:solidFill>
                   <a:srgbClr val="FFFFFF"/>
                 </a:solidFill>
@@ -5748,8 +5774,8 @@
         </p:nvSpPr>
         <p:spPr>
           <a:xfrm>
-            <a:off x="1417320" y="3721607"/>
-            <a:ext cx="10058400" cy="685800"/>
+            <a:off x="1207008" y="3794760"/>
+            <a:ext cx="3566160" cy="914400"/>
           </a:xfrm>
           <a:prstGeom prst="rect">
             <a:avLst/>
@@ -5763,7 +5789,7 @@
           <a:lstStyle/>
           <a:p>
             <a:r>
-              <a:rPr sz="1900" b="0" i="0">
+              <a:rPr sz="1700" b="0" i="0">
                 <a:solidFill>
                   <a:srgbClr val="0B0B0B"/>
                 </a:solidFill>
@@ -5771,14 +5797,21 @@
               </a:rPr>
               <a:t>Integrity audit</a:t>
             </a:r>
-            <a:r>
-              <a:rPr sz="1600" b="0" i="0">
+          </a:p>
+          <a:p>
+            <a:pPr>
+              <a:spcBef>
+                <a:spcPts val="200"/>
+              </a:spcBef>
+            </a:pPr>
+            <a:r>
+              <a:rPr sz="1300" b="0" i="0">
                 <a:solidFill>
                   <a:srgbClr val="52514E"/>
                 </a:solidFill>
                 <a:latin typeface="Segoe UI"/>
               </a:rPr>
-              <a:t>   greenwashing flags and cross-report contradictions</a:t>
+              <a:t>score, greenwashing flags, contradictions, fact-check</a:t>
             </a:r>
           </a:p>
         </p:txBody>
@@ -5791,8 +5824,8 @@
         </p:nvSpPr>
         <p:spPr>
           <a:xfrm>
-            <a:off x="548640" y="4672583"/>
-            <a:ext cx="566928" cy="566928"/>
+            <a:off x="548640" y="4855464"/>
+            <a:ext cx="457200" cy="457200"/>
           </a:xfrm>
           <a:prstGeom prst="ellipse">
             <a:avLst/>
@@ -5820,12 +5853,12 @@
           </a:fontRef>
         </p:style>
         <p:txBody>
-          <a:bodyPr rtlCol="0" anchor="ctr"/>
+          <a:bodyPr rtlCol="0" anchor="ctr" lIns="0" rIns="0"/>
           <a:lstStyle/>
           <a:p>
             <a:pPr algn="ctr"/>
             <a:r>
-              <a:rPr sz="1700" b="0" i="0">
+              <a:rPr sz="1400" b="0" i="0">
                 <a:solidFill>
                   <a:srgbClr val="FFFFFF"/>
                 </a:solidFill>
@@ -5844,8 +5877,8 @@
         </p:nvSpPr>
         <p:spPr>
           <a:xfrm>
-            <a:off x="1417320" y="4654295"/>
-            <a:ext cx="10058400" cy="685800"/>
+            <a:off x="1207008" y="4818888"/>
+            <a:ext cx="3566160" cy="914400"/>
           </a:xfrm>
           <a:prstGeom prst="rect">
             <a:avLst/>
@@ -5859,7 +5892,7 @@
           <a:lstStyle/>
           <a:p>
             <a:r>
-              <a:rPr sz="1900" b="0" i="0">
+              <a:rPr sz="1700" b="0" i="0">
                 <a:solidFill>
                   <a:srgbClr val="0B0B0B"/>
                 </a:solidFill>
@@ -5867,14 +5900,349 @@
               </a:rPr>
               <a:t>System transparency</a:t>
             </a:r>
-            <a:r>
-              <a:rPr sz="1600" b="0" i="0">
+          </a:p>
+          <a:p>
+            <a:pPr>
+              <a:spcBef>
+                <a:spcPts val="200"/>
+              </a:spcBef>
+            </a:pPr>
+            <a:r>
+              <a:rPr sz="1300" b="0" i="0">
                 <a:solidFill>
                   <a:srgbClr val="52514E"/>
                 </a:solidFill>
                 <a:latin typeface="Segoe UI"/>
               </a:rPr>
-              <a:t>   the pipeline and models behind every number</a:t>
+              <a:t>the pipeline and models behind every number</a:t>
+            </a:r>
+          </a:p>
+        </p:txBody>
+      </p:sp>
+      <p:pic>
+        <p:nvPicPr>
+          <p:cNvPr id="14" name="Picture 13" descr="1-home-globe.png"/>
+          <p:cNvPicPr>
+            <a:picLocks noChangeAspect="1"/>
+          </p:cNvPicPr>
+          <p:nvPr/>
+        </p:nvPicPr>
+        <p:blipFill>
+          <a:blip r:embed="rId2"/>
+          <a:stretch>
+            <a:fillRect/>
+          </a:stretch>
+        </p:blipFill>
+        <p:spPr>
+          <a:xfrm>
+            <a:off x="5074920" y="1737360"/>
+            <a:ext cx="3200400" cy="2000250"/>
+          </a:xfrm>
+          <a:prstGeom prst="rect">
+            <a:avLst/>
+          </a:prstGeom>
+          <a:ln w="9525">
+            <a:solidFill>
+              <a:srgbClr val="C3C2B7"/>
+            </a:solidFill>
+          </a:ln>
+        </p:spPr>
+      </p:pic>
+      <p:sp>
+        <p:nvSpPr>
+          <p:cNvPr id="15" name="Oval 14"/>
+          <p:cNvSpPr/>
+          <p:nvPr/>
+        </p:nvSpPr>
+        <p:spPr>
+          <a:xfrm>
+            <a:off x="5148072" y="1810512"/>
+            <a:ext cx="292608" cy="292608"/>
+          </a:xfrm>
+          <a:prstGeom prst="ellipse">
+            <a:avLst/>
+          </a:prstGeom>
+          <a:solidFill>
+            <a:srgbClr val="2A78D6"/>
+          </a:solidFill>
+          <a:ln>
+            <a:noFill/>
+          </a:ln>
+          <a:effectLst/>
+        </p:spPr>
+        <p:style>
+          <a:lnRef idx="1">
+            <a:schemeClr val="accent1"/>
+          </a:lnRef>
+          <a:fillRef idx="3">
+            <a:schemeClr val="accent1"/>
+          </a:fillRef>
+          <a:effectRef idx="2">
+            <a:schemeClr val="accent1"/>
+          </a:effectRef>
+          <a:fontRef idx="minor">
+            <a:schemeClr val="lt1"/>
+          </a:fontRef>
+        </p:style>
+        <p:txBody>
+          <a:bodyPr rtlCol="0" anchor="ctr" lIns="0" rIns="0"/>
+          <a:lstStyle/>
+          <a:p>
+            <a:pPr algn="ctr"/>
+            <a:r>
+              <a:rPr sz="1000" b="0" i="0">
+                <a:solidFill>
+                  <a:srgbClr val="FFFFFF"/>
+                </a:solidFill>
+                <a:latin typeface="Segoe UI Semibold"/>
+              </a:rPr>
+              <a:t>1</a:t>
+            </a:r>
+          </a:p>
+        </p:txBody>
+      </p:sp>
+      <p:pic>
+        <p:nvPicPr>
+          <p:cNvPr id="16" name="Picture 15" descr="2-claim-explorer.png"/>
+          <p:cNvPicPr>
+            <a:picLocks noChangeAspect="1"/>
+          </p:cNvPicPr>
+          <p:nvPr/>
+        </p:nvPicPr>
+        <p:blipFill>
+          <a:blip r:embed="rId3"/>
+          <a:stretch>
+            <a:fillRect/>
+          </a:stretch>
+        </p:blipFill>
+        <p:spPr>
+          <a:xfrm>
+            <a:off x="8439912" y="1737360"/>
+            <a:ext cx="3200400" cy="2000250"/>
+          </a:xfrm>
+          <a:prstGeom prst="rect">
+            <a:avLst/>
+          </a:prstGeom>
+          <a:ln w="9525">
+            <a:solidFill>
+              <a:srgbClr val="C3C2B7"/>
+            </a:solidFill>
+          </a:ln>
+        </p:spPr>
+      </p:pic>
+      <p:sp>
+        <p:nvSpPr>
+          <p:cNvPr id="17" name="Oval 16"/>
+          <p:cNvSpPr/>
+          <p:nvPr/>
+        </p:nvSpPr>
+        <p:spPr>
+          <a:xfrm>
+            <a:off x="8513064" y="1810512"/>
+            <a:ext cx="292608" cy="292608"/>
+          </a:xfrm>
+          <a:prstGeom prst="ellipse">
+            <a:avLst/>
+          </a:prstGeom>
+          <a:solidFill>
+            <a:srgbClr val="2A78D6"/>
+          </a:solidFill>
+          <a:ln>
+            <a:noFill/>
+          </a:ln>
+          <a:effectLst/>
+        </p:spPr>
+        <p:style>
+          <a:lnRef idx="1">
+            <a:schemeClr val="accent1"/>
+          </a:lnRef>
+          <a:fillRef idx="3">
+            <a:schemeClr val="accent1"/>
+          </a:fillRef>
+          <a:effectRef idx="2">
+            <a:schemeClr val="accent1"/>
+          </a:effectRef>
+          <a:fontRef idx="minor">
+            <a:schemeClr val="lt1"/>
+          </a:fontRef>
+        </p:style>
+        <p:txBody>
+          <a:bodyPr rtlCol="0" anchor="ctr" lIns="0" rIns="0"/>
+          <a:lstStyle/>
+          <a:p>
+            <a:pPr algn="ctr"/>
+            <a:r>
+              <a:rPr sz="1000" b="0" i="0">
+                <a:solidFill>
+                  <a:srgbClr val="FFFFFF"/>
+                </a:solidFill>
+                <a:latin typeface="Segoe UI Semibold"/>
+              </a:rPr>
+              <a:t>2</a:t>
+            </a:r>
+          </a:p>
+        </p:txBody>
+      </p:sp>
+      <p:pic>
+        <p:nvPicPr>
+          <p:cNvPr id="18" name="Picture 17" descr="3-integrity-audit.png"/>
+          <p:cNvPicPr>
+            <a:picLocks noChangeAspect="1"/>
+          </p:cNvPicPr>
+          <p:nvPr/>
+        </p:nvPicPr>
+        <p:blipFill>
+          <a:blip r:embed="rId4"/>
+          <a:stretch>
+            <a:fillRect/>
+          </a:stretch>
+        </p:blipFill>
+        <p:spPr>
+          <a:xfrm>
+            <a:off x="5074920" y="3902202"/>
+            <a:ext cx="3200400" cy="2000250"/>
+          </a:xfrm>
+          <a:prstGeom prst="rect">
+            <a:avLst/>
+          </a:prstGeom>
+          <a:ln w="9525">
+            <a:solidFill>
+              <a:srgbClr val="C3C2B7"/>
+            </a:solidFill>
+          </a:ln>
+        </p:spPr>
+      </p:pic>
+      <p:sp>
+        <p:nvSpPr>
+          <p:cNvPr id="19" name="Oval 18"/>
+          <p:cNvSpPr/>
+          <p:nvPr/>
+        </p:nvSpPr>
+        <p:spPr>
+          <a:xfrm>
+            <a:off x="5148072" y="3975354"/>
+            <a:ext cx="292608" cy="292608"/>
+          </a:xfrm>
+          <a:prstGeom prst="ellipse">
+            <a:avLst/>
+          </a:prstGeom>
+          <a:solidFill>
+            <a:srgbClr val="2A78D6"/>
+          </a:solidFill>
+          <a:ln>
+            <a:noFill/>
+          </a:ln>
+          <a:effectLst/>
+        </p:spPr>
+        <p:style>
+          <a:lnRef idx="1">
+            <a:schemeClr val="accent1"/>
+          </a:lnRef>
+          <a:fillRef idx="3">
+            <a:schemeClr val="accent1"/>
+          </a:fillRef>
+          <a:effectRef idx="2">
+            <a:schemeClr val="accent1"/>
+          </a:effectRef>
+          <a:fontRef idx="minor">
+            <a:schemeClr val="lt1"/>
+          </a:fontRef>
+        </p:style>
+        <p:txBody>
+          <a:bodyPr rtlCol="0" anchor="ctr" lIns="0" rIns="0"/>
+          <a:lstStyle/>
+          <a:p>
+            <a:pPr algn="ctr"/>
+            <a:r>
+              <a:rPr sz="1000" b="0" i="0">
+                <a:solidFill>
+                  <a:srgbClr val="FFFFFF"/>
+                </a:solidFill>
+                <a:latin typeface="Segoe UI Semibold"/>
+              </a:rPr>
+              <a:t>3</a:t>
+            </a:r>
+          </a:p>
+        </p:txBody>
+      </p:sp>
+      <p:pic>
+        <p:nvPicPr>
+          <p:cNvPr id="20" name="Picture 19" descr="4-system-transparency.png"/>
+          <p:cNvPicPr>
+            <a:picLocks noChangeAspect="1"/>
+          </p:cNvPicPr>
+          <p:nvPr/>
+        </p:nvPicPr>
+        <p:blipFill>
+          <a:blip r:embed="rId5"/>
+          <a:stretch>
+            <a:fillRect/>
+          </a:stretch>
+        </p:blipFill>
+        <p:spPr>
+          <a:xfrm>
+            <a:off x="8439912" y="3902202"/>
+            <a:ext cx="3200400" cy="2000250"/>
+          </a:xfrm>
+          <a:prstGeom prst="rect">
+            <a:avLst/>
+          </a:prstGeom>
+          <a:ln w="9525">
+            <a:solidFill>
+              <a:srgbClr val="C3C2B7"/>
+            </a:solidFill>
+          </a:ln>
+        </p:spPr>
+      </p:pic>
+      <p:sp>
+        <p:nvSpPr>
+          <p:cNvPr id="21" name="Oval 20"/>
+          <p:cNvSpPr/>
+          <p:nvPr/>
+        </p:nvSpPr>
+        <p:spPr>
+          <a:xfrm>
+            <a:off x="8513064" y="3975354"/>
+            <a:ext cx="292608" cy="292608"/>
+          </a:xfrm>
+          <a:prstGeom prst="ellipse">
+            <a:avLst/>
+          </a:prstGeom>
+          <a:solidFill>
+            <a:srgbClr val="2A78D6"/>
+          </a:solidFill>
+          <a:ln>
+            <a:noFill/>
+          </a:ln>
+          <a:effectLst/>
+        </p:spPr>
+        <p:style>
+          <a:lnRef idx="1">
+            <a:schemeClr val="accent1"/>
+          </a:lnRef>
+          <a:fillRef idx="3">
+            <a:schemeClr val="accent1"/>
+          </a:fillRef>
+          <a:effectRef idx="2">
+            <a:schemeClr val="accent1"/>
+          </a:effectRef>
+          <a:fontRef idx="minor">
+            <a:schemeClr val="lt1"/>
+          </a:fontRef>
+        </p:style>
+        <p:txBody>
+          <a:bodyPr rtlCol="0" anchor="ctr" lIns="0" rIns="0"/>
+          <a:lstStyle/>
+          <a:p>
+            <a:pPr algn="ctr"/>
+            <a:r>
+              <a:rPr sz="1000" b="0" i="0">
+                <a:solidFill>
+                  <a:srgbClr val="FFFFFF"/>
+                </a:solidFill>
+                <a:latin typeface="Segoe UI Semibold"/>
+              </a:rPr>
+              <a:t>4</a:t>
             </a:r>
           </a:p>
         </p:txBody>
@@ -7880,7 +8248,7 @@
                 </a:solidFill>
                 <a:latin typeface="Segoe UI"/>
               </a:rPr>
-              <a:t>Counts from the live database, not a mock-up</a:t>
+              <a:t>The full corpus as ingested and audited — not a mock-up</a:t>
             </a:r>
           </a:p>
         </p:txBody>
